--- a/Tuan 3/bao-cao-tuan3-apex-mem.pptx
+++ b/Tuan 3/bao-cao-tuan3-apex-mem.pptx
@@ -5,7 +5,7 @@
     <p:sldMasterId id="2147483648" r:id="rId1"/>
   </p:sldMasterIdLst>
   <p:notesMasterIdLst>
-    <p:notesMasterId r:id="rId16"/>
+    <p:notesMasterId r:id="rId17"/>
   </p:notesMasterIdLst>
   <p:sldIdLst>
     <p:sldId id="256" r:id="rId2"/>
@@ -22,6 +22,7 @@
     <p:sldId id="267" r:id="rId13"/>
     <p:sldId id="268" r:id="rId14"/>
     <p:sldId id="269" r:id="rId15"/>
+    <p:sldId id="270" r:id="rId16"/>
   </p:sldIdLst>
   <p:sldSz cx="12192000" cy="6858000"/>
   <p:notesSz cx="6858000" cy="12192000"/>
@@ -1765,6 +1766,226 @@
 </p:sldLayout>
 </file>
 
+<file path=ppt/slideLayouts/slideLayout2.xml><?xml version="1.0" encoding="utf-8"?>
+<p:sldLayout xmlns:a="http://schemas.openxmlformats.org/drawingml/2006/main" xmlns:r="http://schemas.openxmlformats.org/officeDocument/2006/relationships" xmlns:p="http://schemas.openxmlformats.org/presentationml/2006/main" type="title">
+  <p:cSld name="Title Slide">
+    <p:spTree>
+      <p:nvGrpSpPr>
+        <p:cNvPr id="1" name=""/>
+        <p:cNvGrpSpPr/>
+        <p:nvPr/>
+      </p:nvGrpSpPr>
+      <p:grpSpPr>
+        <a:xfrm>
+          <a:off x="0" y="0"/>
+          <a:ext cx="0" cy="0"/>
+          <a:chOff x="0" y="0"/>
+          <a:chExt cx="0" cy="0"/>
+        </a:xfrm>
+      </p:grpSpPr>
+      <p:sp>
+        <p:nvSpPr>
+          <p:cNvPr id="2" name="Title 1">
+            <a:extLst>
+              <a:ext uri="{FF2B5EF4-FFF2-40B4-BE49-F238E27FC236}">
+                <a16:creationId xmlns:a16="http://schemas.microsoft.com/office/drawing/2014/main" id="{AFD3DB14-C994-A889-7A6A-AF632170ED81}"/>
+              </a:ext>
+            </a:extLst>
+          </p:cNvPr>
+          <p:cNvSpPr>
+            <a:spLocks noGrp="1"/>
+          </p:cNvSpPr>
+          <p:nvPr>
+            <p:ph type="ctrTitle"/>
+          </p:nvPr>
+        </p:nvSpPr>
+        <p:spPr>
+          <a:xfrm>
+            <a:off x="1524000" y="1122363"/>
+            <a:ext cx="9144000" cy="2387600"/>
+          </a:xfrm>
+        </p:spPr>
+        <p:txBody>
+          <a:bodyPr anchor="b"/>
+          <a:lstStyle>
+            <a:lvl1pPr algn="ctr">
+              <a:defRPr sz="6000"/>
+            </a:lvl1pPr>
+          </a:lstStyle>
+          <a:p>
+            <a:r>
+              <a:rPr lang="en-US"/>
+              <a:t>Click to edit Master title style</a:t>
+            </a:r>
+          </a:p>
+        </p:txBody>
+      </p:sp>
+      <p:sp>
+        <p:nvSpPr>
+          <p:cNvPr id="3" name="Subtitle 2">
+            <a:extLst>
+              <a:ext uri="{FF2B5EF4-FFF2-40B4-BE49-F238E27FC236}">
+                <a16:creationId xmlns:a16="http://schemas.microsoft.com/office/drawing/2014/main" id="{84589DC6-07E3-D318-0C89-19562A8268DD}"/>
+              </a:ext>
+            </a:extLst>
+          </p:cNvPr>
+          <p:cNvSpPr>
+            <a:spLocks noGrp="1"/>
+          </p:cNvSpPr>
+          <p:nvPr>
+            <p:ph type="subTitle" idx="1"/>
+          </p:nvPr>
+        </p:nvSpPr>
+        <p:spPr>
+          <a:xfrm>
+            <a:off x="1524000" y="3602038"/>
+            <a:ext cx="9144000" cy="1655762"/>
+          </a:xfrm>
+        </p:spPr>
+        <p:txBody>
+          <a:bodyPr/>
+          <a:lstStyle>
+            <a:lvl1pPr marL="0" indent="0" algn="ctr">
+              <a:buNone/>
+              <a:defRPr sz="2400"/>
+            </a:lvl1pPr>
+            <a:lvl2pPr marL="457200" indent="0" algn="ctr">
+              <a:buNone/>
+              <a:defRPr sz="2000"/>
+            </a:lvl2pPr>
+            <a:lvl3pPr marL="914400" indent="0" algn="ctr">
+              <a:buNone/>
+              <a:defRPr sz="1800"/>
+            </a:lvl3pPr>
+            <a:lvl4pPr marL="1371600" indent="0" algn="ctr">
+              <a:buNone/>
+              <a:defRPr sz="1600"/>
+            </a:lvl4pPr>
+            <a:lvl5pPr marL="1828800" indent="0" algn="ctr">
+              <a:buNone/>
+              <a:defRPr sz="1600"/>
+            </a:lvl5pPr>
+            <a:lvl6pPr marL="2286000" indent="0" algn="ctr">
+              <a:buNone/>
+              <a:defRPr sz="1600"/>
+            </a:lvl6pPr>
+            <a:lvl7pPr marL="2743200" indent="0" algn="ctr">
+              <a:buNone/>
+              <a:defRPr sz="1600"/>
+            </a:lvl7pPr>
+            <a:lvl8pPr marL="3200400" indent="0" algn="ctr">
+              <a:buNone/>
+              <a:defRPr sz="1600"/>
+            </a:lvl8pPr>
+            <a:lvl9pPr marL="3657600" indent="0" algn="ctr">
+              <a:buNone/>
+              <a:defRPr sz="1600"/>
+            </a:lvl9pPr>
+          </a:lstStyle>
+          <a:p>
+            <a:r>
+              <a:rPr lang="en-US"/>
+              <a:t>Click to edit Master subtitle style</a:t>
+            </a:r>
+          </a:p>
+        </p:txBody>
+      </p:sp>
+      <p:sp>
+        <p:nvSpPr>
+          <p:cNvPr id="4" name="Date Placeholder 3">
+            <a:extLst>
+              <a:ext uri="{FF2B5EF4-FFF2-40B4-BE49-F238E27FC236}">
+                <a16:creationId xmlns:a16="http://schemas.microsoft.com/office/drawing/2014/main" id="{ED5C040C-C656-45F5-8D40-0C03F11200CE}"/>
+              </a:ext>
+            </a:extLst>
+          </p:cNvPr>
+          <p:cNvSpPr>
+            <a:spLocks noGrp="1"/>
+          </p:cNvSpPr>
+          <p:nvPr>
+            <p:ph type="dt" sz="half" idx="10"/>
+          </p:nvPr>
+        </p:nvSpPr>
+        <p:spPr/>
+        <p:txBody>
+          <a:bodyPr/>
+          <a:lstStyle/>
+          <a:p>
+            <a:fld id="{38DCD071-F201-46E7-9901-581B29C07CD9}" type="datetimeFigureOut">
+              <a:rPr lang="en-US" smtClean="0"/>
+              <a:t>9/28/2026</a:t>
+            </a:fld>
+            <a:endParaRPr lang="en-US"/>
+          </a:p>
+        </p:txBody>
+      </p:sp>
+      <p:sp>
+        <p:nvSpPr>
+          <p:cNvPr id="5" name="Footer Placeholder 4">
+            <a:extLst>
+              <a:ext uri="{FF2B5EF4-FFF2-40B4-BE49-F238E27FC236}">
+                <a16:creationId xmlns:a16="http://schemas.microsoft.com/office/drawing/2014/main" id="{0B9B0860-6AC5-C573-D59D-2EEA6DB92F42}"/>
+              </a:ext>
+            </a:extLst>
+          </p:cNvPr>
+          <p:cNvSpPr>
+            <a:spLocks noGrp="1"/>
+          </p:cNvSpPr>
+          <p:nvPr>
+            <p:ph type="ftr" sz="quarter" idx="11"/>
+          </p:nvPr>
+        </p:nvSpPr>
+        <p:spPr/>
+        <p:txBody>
+          <a:bodyPr/>
+          <a:lstStyle/>
+          <a:p>
+            <a:endParaRPr lang="en-US"/>
+          </a:p>
+        </p:txBody>
+      </p:sp>
+      <p:sp>
+        <p:nvSpPr>
+          <p:cNvPr id="6" name="Slide Number Placeholder 5">
+            <a:extLst>
+              <a:ext uri="{FF2B5EF4-FFF2-40B4-BE49-F238E27FC236}">
+                <a16:creationId xmlns:a16="http://schemas.microsoft.com/office/drawing/2014/main" id="{0F0E1F59-0FA1-A5AC-15FA-0D385EFDD21B}"/>
+              </a:ext>
+            </a:extLst>
+          </p:cNvPr>
+          <p:cNvSpPr>
+            <a:spLocks noGrp="1"/>
+          </p:cNvSpPr>
+          <p:nvPr>
+            <p:ph type="sldNum" sz="quarter" idx="12"/>
+          </p:nvPr>
+        </p:nvSpPr>
+        <p:spPr/>
+        <p:txBody>
+          <a:bodyPr/>
+          <a:lstStyle/>
+          <a:p>
+            <a:fld id="{EAE8E209-B459-4278-8231-2A8EC236454F}" type="slidenum">
+              <a:rPr lang="en-US" smtClean="0"/>
+              <a:t>‹#›</a:t>
+            </a:fld>
+            <a:endParaRPr lang="en-US"/>
+          </a:p>
+        </p:txBody>
+      </p:sp>
+    </p:spTree>
+    <p:extLst>
+      <p:ext uri="{BB962C8B-B14F-4D97-AF65-F5344CB8AC3E}">
+        <p14:creationId xmlns:p14="http://schemas.microsoft.com/office/powerpoint/2010/main" val="2773907673"/>
+      </p:ext>
+    </p:extLst>
+  </p:cSld>
+  <p:clrMapOvr>
+    <a:masterClrMapping/>
+  </p:clrMapOvr>
+</p:sldLayout>
+</file>
+
 <file path=ppt/slideMasters/slideMaster1.xml><?xml version="1.0" encoding="utf-8"?>
 <p:sldMaster xmlns:a="http://schemas.openxmlformats.org/drawingml/2006/main" xmlns:r="http://schemas.openxmlformats.org/officeDocument/2006/relationships" xmlns:p="http://schemas.openxmlformats.org/presentationml/2006/main">
   <p:cSld>
@@ -1792,6 +2013,7 @@
   <p:clrMap bg1="lt1" tx1="dk1" bg2="lt2" tx2="dk2" accent1="accent1" accent2="accent2" accent3="accent3" accent4="accent4" accent5="accent5" accent6="accent6" hlink="hlink" folHlink="folHlink"/>
   <p:sldLayoutIdLst>
     <p:sldLayoutId id="2147483649" r:id="rId1"/>
+    <p:sldLayoutId id="2147483650" r:id="rId2"/>
   </p:sldLayoutIdLst>
   <p:hf sldNum="0" hdr="0" ftr="0" dt="0"/>
   <p:txStyles>
@@ -9486,6 +9708,2097 @@
         </p:txBody>
       </p:sp>
     </p:spTree>
+  </p:cSld>
+  <p:clrMapOvr>
+    <a:masterClrMapping/>
+  </p:clrMapOvr>
+</p:sld>
+</file>
+
+<file path=ppt/slides/slide15.xml><?xml version="1.0" encoding="utf-8"?>
+<p:sld xmlns:a="http://schemas.openxmlformats.org/drawingml/2006/main" xmlns:r="http://schemas.openxmlformats.org/officeDocument/2006/relationships" xmlns:p="http://schemas.openxmlformats.org/presentationml/2006/main">
+  <p:cSld>
+    <p:spTree>
+      <p:nvGrpSpPr>
+        <p:cNvPr id="1" name=""/>
+        <p:cNvGrpSpPr/>
+        <p:nvPr/>
+      </p:nvGrpSpPr>
+      <p:grpSpPr>
+        <a:xfrm>
+          <a:off x="0" y="0"/>
+          <a:ext cx="0" cy="0"/>
+          <a:chOff x="0" y="0"/>
+          <a:chExt cx="0" cy="0"/>
+        </a:xfrm>
+      </p:grpSpPr>
+      <p:sp>
+        <p:nvSpPr>
+          <p:cNvPr id="67" name="Text 0">
+            <a:extLst>
+              <a:ext uri="{FF2B5EF4-FFF2-40B4-BE49-F238E27FC236}">
+                <a16:creationId xmlns:a16="http://schemas.microsoft.com/office/drawing/2014/main" id="{3B4456BE-6B09-C93D-84B3-060739BCF9A0}"/>
+              </a:ext>
+            </a:extLst>
+          </p:cNvPr>
+          <p:cNvSpPr txBox="1"/>
+          <p:nvPr/>
+        </p:nvSpPr>
+        <p:spPr>
+          <a:xfrm>
+            <a:off x="566928" y="502920"/>
+            <a:ext cx="6345936" cy="283464"/>
+          </a:xfrm>
+          <a:prstGeom prst="rect">
+            <a:avLst/>
+          </a:prstGeom>
+          <a:noFill/>
+          <a:ln/>
+        </p:spPr>
+        <p:txBody>
+          <a:bodyPr wrap="square" lIns="0" tIns="0" rIns="0" bIns="0" rtlCol="0" anchor="ctr"/>
+          <a:lstStyle/>
+          <a:p>
+            <a:pPr marL="0" indent="0">
+              <a:buNone/>
+            </a:pPr>
+            <a:r>
+              <a:rPr lang="en-US" sz="1200" b="1" dirty="0">
+                <a:solidFill>
+                  <a:srgbClr val="3A36A0"/>
+                </a:solidFill>
+                <a:latin typeface="Calibri" pitchFamily="34" charset="0"/>
+                <a:ea typeface="Calibri" pitchFamily="34" charset="-122"/>
+                <a:cs typeface="Calibri" pitchFamily="34" charset="-120"/>
+              </a:rPr>
+              <a:t>KẾ HOẠCH THỰC HIỆN</a:t>
+            </a:r>
+            <a:endParaRPr lang="en-US" sz="1200" dirty="0"/>
+          </a:p>
+        </p:txBody>
+      </p:sp>
+      <p:sp>
+        <p:nvSpPr>
+          <p:cNvPr id="69" name="Text 1">
+            <a:extLst>
+              <a:ext uri="{FF2B5EF4-FFF2-40B4-BE49-F238E27FC236}">
+                <a16:creationId xmlns:a16="http://schemas.microsoft.com/office/drawing/2014/main" id="{C111DE67-7DAE-BAF7-251B-B24633BBF1AC}"/>
+              </a:ext>
+            </a:extLst>
+          </p:cNvPr>
+          <p:cNvSpPr txBox="1"/>
+          <p:nvPr/>
+        </p:nvSpPr>
+        <p:spPr>
+          <a:xfrm>
+            <a:off x="566928" y="822960"/>
+            <a:ext cx="11045952" cy="640080"/>
+          </a:xfrm>
+          <a:prstGeom prst="rect">
+            <a:avLst/>
+          </a:prstGeom>
+          <a:noFill/>
+          <a:ln/>
+        </p:spPr>
+        <p:txBody>
+          <a:bodyPr wrap="square" lIns="0" tIns="0" rIns="0" bIns="0" rtlCol="0" anchor="ctr"/>
+          <a:lstStyle/>
+          <a:p>
+            <a:pPr marL="0" indent="0">
+              <a:buNone/>
+            </a:pPr>
+            <a:r>
+              <a:rPr lang="en-US" sz="3000" b="1" dirty="0">
+                <a:solidFill>
+                  <a:srgbClr val="13123A"/>
+                </a:solidFill>
+                <a:latin typeface="Cambria" pitchFamily="34" charset="0"/>
+                <a:ea typeface="Cambria" pitchFamily="34" charset="-122"/>
+                <a:cs typeface="Cambria" pitchFamily="34" charset="-120"/>
+              </a:rPr>
+              <a:t>Lộ </a:t>
+            </a:r>
+            <a:r>
+              <a:rPr lang="en-US" sz="3000" b="1" dirty="0" err="1">
+                <a:solidFill>
+                  <a:srgbClr val="13123A"/>
+                </a:solidFill>
+                <a:latin typeface="Cambria" pitchFamily="34" charset="0"/>
+                <a:ea typeface="Cambria" pitchFamily="34" charset="-122"/>
+                <a:cs typeface="Cambria" pitchFamily="34" charset="-120"/>
+              </a:rPr>
+              <a:t>trình</a:t>
+            </a:r>
+            <a:r>
+              <a:rPr lang="en-US" sz="3000" b="1" dirty="0">
+                <a:solidFill>
+                  <a:srgbClr val="13123A"/>
+                </a:solidFill>
+                <a:latin typeface="Cambria" pitchFamily="34" charset="0"/>
+                <a:ea typeface="Cambria" pitchFamily="34" charset="-122"/>
+                <a:cs typeface="Cambria" pitchFamily="34" charset="-120"/>
+              </a:rPr>
+              <a:t> 7 </a:t>
+            </a:r>
+            <a:r>
+              <a:rPr lang="en-US" sz="3000" b="1" dirty="0" err="1">
+                <a:solidFill>
+                  <a:srgbClr val="13123A"/>
+                </a:solidFill>
+                <a:latin typeface="Cambria" pitchFamily="34" charset="0"/>
+                <a:ea typeface="Cambria" pitchFamily="34" charset="-122"/>
+                <a:cs typeface="Cambria" pitchFamily="34" charset="-120"/>
+              </a:rPr>
+              <a:t>tuần</a:t>
+            </a:r>
+            <a:endParaRPr lang="en-US" sz="3000" dirty="0"/>
+          </a:p>
+        </p:txBody>
+      </p:sp>
+      <p:sp>
+        <p:nvSpPr>
+          <p:cNvPr id="71" name="Shape 2">
+            <a:extLst>
+              <a:ext uri="{FF2B5EF4-FFF2-40B4-BE49-F238E27FC236}">
+                <a16:creationId xmlns:a16="http://schemas.microsoft.com/office/drawing/2014/main" id="{18397019-7095-1EF4-ECE2-368671FD39B8}"/>
+              </a:ext>
+            </a:extLst>
+          </p:cNvPr>
+          <p:cNvSpPr/>
+          <p:nvPr/>
+        </p:nvSpPr>
+        <p:spPr>
+          <a:xfrm>
+            <a:off x="566928" y="1783080"/>
+            <a:ext cx="5340096" cy="932688"/>
+          </a:xfrm>
+          <a:prstGeom prst="roundRect">
+            <a:avLst>
+              <a:gd name="adj" fmla="val 4902"/>
+            </a:avLst>
+          </a:prstGeom>
+          <a:solidFill>
+            <a:srgbClr val="F1F2FB"/>
+          </a:solidFill>
+          <a:ln w="12700">
+            <a:solidFill>
+              <a:srgbClr val="F1F2FB"/>
+            </a:solidFill>
+            <a:prstDash val="solid"/>
+          </a:ln>
+        </p:spPr>
+        <p:txBody>
+          <a:bodyPr/>
+          <a:lstStyle/>
+          <a:p>
+            <a:endParaRPr lang="en-US"/>
+          </a:p>
+        </p:txBody>
+      </p:sp>
+      <p:sp>
+        <p:nvSpPr>
+          <p:cNvPr id="73" name="Shape 3">
+            <a:extLst>
+              <a:ext uri="{FF2B5EF4-FFF2-40B4-BE49-F238E27FC236}">
+                <a16:creationId xmlns:a16="http://schemas.microsoft.com/office/drawing/2014/main" id="{6C25C6DD-9C93-20AB-C976-E61C69E5730A}"/>
+              </a:ext>
+            </a:extLst>
+          </p:cNvPr>
+          <p:cNvSpPr/>
+          <p:nvPr/>
+        </p:nvSpPr>
+        <p:spPr>
+          <a:xfrm>
+            <a:off x="749808" y="1965960"/>
+            <a:ext cx="960120" cy="566928"/>
+          </a:xfrm>
+          <a:prstGeom prst="roundRect">
+            <a:avLst>
+              <a:gd name="adj" fmla="val 12903"/>
+            </a:avLst>
+          </a:prstGeom>
+          <a:solidFill>
+            <a:srgbClr val="3A36A0"/>
+          </a:solidFill>
+          <a:ln w="12700">
+            <a:solidFill>
+              <a:srgbClr val="3A36A0"/>
+            </a:solidFill>
+            <a:prstDash val="solid"/>
+          </a:ln>
+        </p:spPr>
+        <p:txBody>
+          <a:bodyPr/>
+          <a:lstStyle/>
+          <a:p>
+            <a:endParaRPr lang="en-US"/>
+          </a:p>
+        </p:txBody>
+      </p:sp>
+      <p:sp>
+        <p:nvSpPr>
+          <p:cNvPr id="75" name="Text 4">
+            <a:extLst>
+              <a:ext uri="{FF2B5EF4-FFF2-40B4-BE49-F238E27FC236}">
+                <a16:creationId xmlns:a16="http://schemas.microsoft.com/office/drawing/2014/main" id="{71C2BA7B-2DD9-3B6C-E4B0-CF8090C060F2}"/>
+              </a:ext>
+            </a:extLst>
+          </p:cNvPr>
+          <p:cNvSpPr txBox="1"/>
+          <p:nvPr/>
+        </p:nvSpPr>
+        <p:spPr>
+          <a:xfrm>
+            <a:off x="749808" y="1965960"/>
+            <a:ext cx="960120" cy="566928"/>
+          </a:xfrm>
+          <a:prstGeom prst="rect">
+            <a:avLst/>
+          </a:prstGeom>
+          <a:noFill/>
+          <a:ln/>
+        </p:spPr>
+        <p:txBody>
+          <a:bodyPr wrap="square" lIns="0" tIns="0" rIns="0" bIns="0" rtlCol="0" anchor="ctr"/>
+          <a:lstStyle/>
+          <a:p>
+            <a:pPr marL="0" indent="0" algn="ctr">
+              <a:buNone/>
+            </a:pPr>
+            <a:r>
+              <a:rPr lang="en-US" sz="1400" b="1" dirty="0">
+                <a:solidFill>
+                  <a:srgbClr val="FFFFFF"/>
+                </a:solidFill>
+                <a:latin typeface="Calibri" pitchFamily="34" charset="0"/>
+                <a:ea typeface="Calibri" pitchFamily="34" charset="-122"/>
+                <a:cs typeface="Calibri" pitchFamily="34" charset="-120"/>
+              </a:rPr>
+              <a:t>Tuần 1</a:t>
+            </a:r>
+            <a:endParaRPr lang="en-US" sz="1400" dirty="0"/>
+          </a:p>
+        </p:txBody>
+      </p:sp>
+      <p:sp>
+        <p:nvSpPr>
+          <p:cNvPr id="77" name="Text 5">
+            <a:extLst>
+              <a:ext uri="{FF2B5EF4-FFF2-40B4-BE49-F238E27FC236}">
+                <a16:creationId xmlns:a16="http://schemas.microsoft.com/office/drawing/2014/main" id="{A55D4EB3-8A02-A972-42B8-FA8BE25FE379}"/>
+              </a:ext>
+            </a:extLst>
+          </p:cNvPr>
+          <p:cNvSpPr txBox="1"/>
+          <p:nvPr/>
+        </p:nvSpPr>
+        <p:spPr>
+          <a:xfrm>
+            <a:off x="1865376" y="1901952"/>
+            <a:ext cx="3886200" cy="731520"/>
+          </a:xfrm>
+          <a:prstGeom prst="rect">
+            <a:avLst/>
+          </a:prstGeom>
+          <a:noFill/>
+          <a:ln/>
+        </p:spPr>
+        <p:txBody>
+          <a:bodyPr wrap="square" lIns="0" tIns="0" rIns="0" bIns="0" rtlCol="0" anchor="ctr"/>
+          <a:lstStyle/>
+          <a:p>
+            <a:pPr marL="0" indent="0">
+              <a:lnSpc>
+                <a:spcPct val="95000"/>
+              </a:lnSpc>
+              <a:buNone/>
+            </a:pPr>
+            <a:r>
+              <a:rPr lang="en-US" sz="1180" dirty="0">
+                <a:solidFill>
+                  <a:srgbClr val="20223A"/>
+                </a:solidFill>
+                <a:latin typeface="Calibri" pitchFamily="34" charset="0"/>
+                <a:ea typeface="Calibri" pitchFamily="34" charset="-122"/>
+                <a:cs typeface="Calibri" pitchFamily="34" charset="-120"/>
+              </a:rPr>
+              <a:t>Nghiên cứu nền tảng &amp; khảo sát liên quan; đặt vấn đề, phạm vi.</a:t>
+            </a:r>
+            <a:endParaRPr lang="en-US" sz="1180" dirty="0"/>
+          </a:p>
+        </p:txBody>
+      </p:sp>
+      <p:sp>
+        <p:nvSpPr>
+          <p:cNvPr id="79" name="Shape 6">
+            <a:extLst>
+              <a:ext uri="{FF2B5EF4-FFF2-40B4-BE49-F238E27FC236}">
+                <a16:creationId xmlns:a16="http://schemas.microsoft.com/office/drawing/2014/main" id="{F4DF2498-D7F9-E8AE-B6C9-27FD6B19F4EA}"/>
+              </a:ext>
+            </a:extLst>
+          </p:cNvPr>
+          <p:cNvSpPr/>
+          <p:nvPr/>
+        </p:nvSpPr>
+        <p:spPr>
+          <a:xfrm>
+            <a:off x="587114" y="3835908"/>
+            <a:ext cx="5340096" cy="932688"/>
+          </a:xfrm>
+          <a:prstGeom prst="roundRect">
+            <a:avLst>
+              <a:gd name="adj" fmla="val 4902"/>
+            </a:avLst>
+          </a:prstGeom>
+          <a:solidFill>
+            <a:srgbClr val="13123A"/>
+          </a:solidFill>
+          <a:ln w="12700">
+            <a:solidFill>
+              <a:srgbClr val="13123A"/>
+            </a:solidFill>
+            <a:prstDash val="solid"/>
+          </a:ln>
+        </p:spPr>
+        <p:txBody>
+          <a:bodyPr/>
+          <a:lstStyle/>
+          <a:p>
+            <a:endParaRPr lang="en-US"/>
+          </a:p>
+        </p:txBody>
+      </p:sp>
+      <p:sp>
+        <p:nvSpPr>
+          <p:cNvPr id="81" name="Shape 7">
+            <a:extLst>
+              <a:ext uri="{FF2B5EF4-FFF2-40B4-BE49-F238E27FC236}">
+                <a16:creationId xmlns:a16="http://schemas.microsoft.com/office/drawing/2014/main" id="{2100271F-9E82-B0F3-C223-9DC057293237}"/>
+              </a:ext>
+            </a:extLst>
+          </p:cNvPr>
+          <p:cNvSpPr/>
+          <p:nvPr/>
+        </p:nvSpPr>
+        <p:spPr>
+          <a:xfrm>
+            <a:off x="769994" y="4018788"/>
+            <a:ext cx="960120" cy="566928"/>
+          </a:xfrm>
+          <a:prstGeom prst="roundRect">
+            <a:avLst>
+              <a:gd name="adj" fmla="val 12903"/>
+            </a:avLst>
+          </a:prstGeom>
+          <a:solidFill>
+            <a:srgbClr val="E9970B"/>
+          </a:solidFill>
+          <a:ln w="12700">
+            <a:solidFill>
+              <a:srgbClr val="E9970B"/>
+            </a:solidFill>
+            <a:prstDash val="solid"/>
+          </a:ln>
+        </p:spPr>
+        <p:txBody>
+          <a:bodyPr/>
+          <a:lstStyle/>
+          <a:p>
+            <a:endParaRPr lang="en-US"/>
+          </a:p>
+        </p:txBody>
+      </p:sp>
+      <p:sp>
+        <p:nvSpPr>
+          <p:cNvPr id="83" name="Text 8">
+            <a:extLst>
+              <a:ext uri="{FF2B5EF4-FFF2-40B4-BE49-F238E27FC236}">
+                <a16:creationId xmlns:a16="http://schemas.microsoft.com/office/drawing/2014/main" id="{EC26944B-09D0-9A65-DBF7-8670F8D1EECF}"/>
+              </a:ext>
+            </a:extLst>
+          </p:cNvPr>
+          <p:cNvSpPr txBox="1"/>
+          <p:nvPr/>
+        </p:nvSpPr>
+        <p:spPr>
+          <a:xfrm>
+            <a:off x="769994" y="4018788"/>
+            <a:ext cx="960120" cy="566928"/>
+          </a:xfrm>
+          <a:prstGeom prst="rect">
+            <a:avLst/>
+          </a:prstGeom>
+          <a:noFill/>
+          <a:ln/>
+        </p:spPr>
+        <p:txBody>
+          <a:bodyPr wrap="square" lIns="0" tIns="0" rIns="0" bIns="0" rtlCol="0" anchor="ctr"/>
+          <a:lstStyle/>
+          <a:p>
+            <a:pPr marL="0" indent="0" algn="ctr">
+              <a:buNone/>
+            </a:pPr>
+            <a:r>
+              <a:rPr lang="en-US" sz="1400" b="1" dirty="0" err="1">
+                <a:solidFill>
+                  <a:srgbClr val="13123A"/>
+                </a:solidFill>
+                <a:latin typeface="Calibri" pitchFamily="34" charset="0"/>
+                <a:ea typeface="Calibri" pitchFamily="34" charset="-122"/>
+                <a:cs typeface="Calibri" pitchFamily="34" charset="-120"/>
+              </a:rPr>
+              <a:t>Tuần</a:t>
+            </a:r>
+            <a:r>
+              <a:rPr lang="en-US" sz="1400" b="1" dirty="0">
+                <a:solidFill>
+                  <a:srgbClr val="13123A"/>
+                </a:solidFill>
+                <a:latin typeface="Calibri" pitchFamily="34" charset="0"/>
+                <a:ea typeface="Calibri" pitchFamily="34" charset="-122"/>
+                <a:cs typeface="Calibri" pitchFamily="34" charset="-120"/>
+              </a:rPr>
+              <a:t> 3</a:t>
+            </a:r>
+            <a:endParaRPr lang="en-US" sz="1400" dirty="0"/>
+          </a:p>
+        </p:txBody>
+      </p:sp>
+      <p:sp>
+        <p:nvSpPr>
+          <p:cNvPr id="85" name="Text 9">
+            <a:extLst>
+              <a:ext uri="{FF2B5EF4-FFF2-40B4-BE49-F238E27FC236}">
+                <a16:creationId xmlns:a16="http://schemas.microsoft.com/office/drawing/2014/main" id="{40D85231-48FE-1DA5-8E1E-30238E27FCF4}"/>
+              </a:ext>
+            </a:extLst>
+          </p:cNvPr>
+          <p:cNvSpPr txBox="1"/>
+          <p:nvPr/>
+        </p:nvSpPr>
+        <p:spPr>
+          <a:xfrm>
+            <a:off x="1885562" y="3954780"/>
+            <a:ext cx="2788920" cy="731520"/>
+          </a:xfrm>
+          <a:prstGeom prst="rect">
+            <a:avLst/>
+          </a:prstGeom>
+          <a:noFill/>
+          <a:ln/>
+        </p:spPr>
+        <p:txBody>
+          <a:bodyPr wrap="square" lIns="0" tIns="0" rIns="0" bIns="0" rtlCol="0" anchor="ctr"/>
+          <a:lstStyle/>
+          <a:p>
+            <a:pPr>
+              <a:lnSpc>
+                <a:spcPct val="95000"/>
+              </a:lnSpc>
+            </a:pPr>
+            <a:r>
+              <a:rPr lang="en-US" sz="1180" dirty="0" err="1">
+                <a:solidFill>
+                  <a:srgbClr val="E7E8FB"/>
+                </a:solidFill>
+                <a:latin typeface="Calibri" pitchFamily="34" charset="0"/>
+                <a:ea typeface="Calibri" pitchFamily="34" charset="-122"/>
+                <a:cs typeface="Calibri" pitchFamily="34" charset="-120"/>
+              </a:rPr>
+              <a:t>Thiết</a:t>
+            </a:r>
+            <a:r>
+              <a:rPr lang="en-US" sz="1180" dirty="0">
+                <a:solidFill>
+                  <a:srgbClr val="E7E8FB"/>
+                </a:solidFill>
+                <a:latin typeface="Calibri" pitchFamily="34" charset="0"/>
+                <a:ea typeface="Calibri" pitchFamily="34" charset="-122"/>
+                <a:cs typeface="Calibri" pitchFamily="34" charset="-120"/>
+              </a:rPr>
+              <a:t> </a:t>
+            </a:r>
+            <a:r>
+              <a:rPr lang="en-US" sz="1180" dirty="0" err="1">
+                <a:solidFill>
+                  <a:srgbClr val="E7E8FB"/>
+                </a:solidFill>
+                <a:latin typeface="Calibri" pitchFamily="34" charset="0"/>
+                <a:ea typeface="Calibri" pitchFamily="34" charset="-122"/>
+                <a:cs typeface="Calibri" pitchFamily="34" charset="-120"/>
+              </a:rPr>
+              <a:t>kế</a:t>
+            </a:r>
+            <a:r>
+              <a:rPr lang="en-US" sz="1180" dirty="0">
+                <a:solidFill>
+                  <a:srgbClr val="E7E8FB"/>
+                </a:solidFill>
+                <a:latin typeface="Calibri" pitchFamily="34" charset="0"/>
+                <a:ea typeface="Calibri" pitchFamily="34" charset="-122"/>
+                <a:cs typeface="Calibri" pitchFamily="34" charset="-120"/>
+              </a:rPr>
+              <a:t> </a:t>
+            </a:r>
+            <a:r>
+              <a:rPr lang="en-US" sz="1180" dirty="0" err="1">
+                <a:solidFill>
+                  <a:srgbClr val="E7E8FB"/>
+                </a:solidFill>
+                <a:latin typeface="Calibri" pitchFamily="34" charset="0"/>
+                <a:ea typeface="Calibri" pitchFamily="34" charset="-122"/>
+                <a:cs typeface="Calibri" pitchFamily="34" charset="-120"/>
+              </a:rPr>
+              <a:t>kiến</a:t>
+            </a:r>
+            <a:r>
+              <a:rPr lang="en-US" sz="1180" dirty="0">
+                <a:solidFill>
+                  <a:srgbClr val="E7E8FB"/>
+                </a:solidFill>
+                <a:latin typeface="Calibri" pitchFamily="34" charset="0"/>
+                <a:ea typeface="Calibri" pitchFamily="34" charset="-122"/>
+                <a:cs typeface="Calibri" pitchFamily="34" charset="-120"/>
+              </a:rPr>
+              <a:t> </a:t>
+            </a:r>
+            <a:r>
+              <a:rPr lang="en-US" sz="1180" dirty="0" err="1">
+                <a:solidFill>
+                  <a:srgbClr val="E7E8FB"/>
+                </a:solidFill>
+                <a:latin typeface="Calibri" pitchFamily="34" charset="0"/>
+                <a:ea typeface="Calibri" pitchFamily="34" charset="-122"/>
+                <a:cs typeface="Calibri" pitchFamily="34" charset="-120"/>
+              </a:rPr>
+              <a:t>trúc</a:t>
+            </a:r>
+            <a:r>
+              <a:rPr lang="en-US" sz="1180" dirty="0">
+                <a:solidFill>
+                  <a:srgbClr val="E7E8FB"/>
+                </a:solidFill>
+                <a:latin typeface="Calibri" pitchFamily="34" charset="0"/>
+                <a:ea typeface="Calibri" pitchFamily="34" charset="-122"/>
+                <a:cs typeface="Calibri" pitchFamily="34" charset="-120"/>
+              </a:rPr>
+              <a:t> chi </a:t>
+            </a:r>
+            <a:r>
+              <a:rPr lang="en-US" sz="1180" dirty="0" err="1">
+                <a:solidFill>
+                  <a:srgbClr val="E7E8FB"/>
+                </a:solidFill>
+                <a:latin typeface="Calibri" pitchFamily="34" charset="0"/>
+                <a:ea typeface="Calibri" pitchFamily="34" charset="-122"/>
+                <a:cs typeface="Calibri" pitchFamily="34" charset="-120"/>
+              </a:rPr>
+              <a:t>tiết</a:t>
+            </a:r>
+            <a:r>
+              <a:rPr lang="en-US" sz="1180" dirty="0">
+                <a:solidFill>
+                  <a:srgbClr val="E7E8FB"/>
+                </a:solidFill>
+                <a:latin typeface="Calibri" pitchFamily="34" charset="0"/>
+                <a:ea typeface="Calibri" pitchFamily="34" charset="-122"/>
+                <a:cs typeface="Calibri" pitchFamily="34" charset="-120"/>
+              </a:rPr>
+              <a:t>, </a:t>
+            </a:r>
+            <a:r>
+              <a:rPr lang="en-US" sz="1180" dirty="0" err="1">
+                <a:solidFill>
+                  <a:srgbClr val="E7E8FB"/>
+                </a:solidFill>
+                <a:latin typeface="Calibri" pitchFamily="34" charset="0"/>
+                <a:ea typeface="Calibri" pitchFamily="34" charset="-122"/>
+                <a:cs typeface="Calibri" pitchFamily="34" charset="-120"/>
+              </a:rPr>
+              <a:t>xây</a:t>
+            </a:r>
+            <a:r>
+              <a:rPr lang="en-US" sz="1180" dirty="0">
+                <a:solidFill>
+                  <a:srgbClr val="E7E8FB"/>
+                </a:solidFill>
+                <a:latin typeface="Calibri" pitchFamily="34" charset="0"/>
+                <a:ea typeface="Calibri" pitchFamily="34" charset="-122"/>
+                <a:cs typeface="Calibri" pitchFamily="34" charset="-120"/>
+              </a:rPr>
+              <a:t> </a:t>
+            </a:r>
+            <a:r>
+              <a:rPr lang="en-US" sz="1180" dirty="0" err="1">
+                <a:solidFill>
+                  <a:srgbClr val="E7E8FB"/>
+                </a:solidFill>
+                <a:latin typeface="Calibri" pitchFamily="34" charset="0"/>
+                <a:ea typeface="Calibri" pitchFamily="34" charset="-122"/>
+                <a:cs typeface="Calibri" pitchFamily="34" charset="-120"/>
+              </a:rPr>
+              <a:t>dựng</a:t>
+            </a:r>
+            <a:r>
+              <a:rPr lang="en-US" sz="1180" dirty="0">
+                <a:solidFill>
+                  <a:srgbClr val="E7E8FB"/>
+                </a:solidFill>
+                <a:latin typeface="Calibri" pitchFamily="34" charset="0"/>
+                <a:ea typeface="Calibri" pitchFamily="34" charset="-122"/>
+                <a:cs typeface="Calibri" pitchFamily="34" charset="-120"/>
+              </a:rPr>
+              <a:t> database SQLite, schema, pipeline </a:t>
+            </a:r>
+            <a:r>
+              <a:rPr lang="en-US" sz="1180" dirty="0" err="1">
+                <a:solidFill>
+                  <a:srgbClr val="E7E8FB"/>
+                </a:solidFill>
+                <a:latin typeface="Calibri" pitchFamily="34" charset="0"/>
+                <a:ea typeface="Calibri" pitchFamily="34" charset="-122"/>
+                <a:cs typeface="Calibri" pitchFamily="34" charset="-120"/>
+              </a:rPr>
+              <a:t>hoàn</a:t>
+            </a:r>
+            <a:r>
+              <a:rPr lang="en-US" sz="1180" dirty="0">
+                <a:solidFill>
+                  <a:srgbClr val="E7E8FB"/>
+                </a:solidFill>
+                <a:latin typeface="Calibri" pitchFamily="34" charset="0"/>
+                <a:ea typeface="Calibri" pitchFamily="34" charset="-122"/>
+                <a:cs typeface="Calibri" pitchFamily="34" charset="-120"/>
+              </a:rPr>
+              <a:t> </a:t>
+            </a:r>
+            <a:r>
+              <a:rPr lang="en-US" sz="1180" dirty="0" err="1">
+                <a:solidFill>
+                  <a:srgbClr val="E7E8FB"/>
+                </a:solidFill>
+                <a:latin typeface="Calibri" pitchFamily="34" charset="0"/>
+                <a:ea typeface="Calibri" pitchFamily="34" charset="-122"/>
+                <a:cs typeface="Calibri" pitchFamily="34" charset="-120"/>
+              </a:rPr>
+              <a:t>chỉnh</a:t>
+            </a:r>
+            <a:endParaRPr lang="en-US" sz="1180" dirty="0"/>
+          </a:p>
+        </p:txBody>
+      </p:sp>
+      <p:sp>
+        <p:nvSpPr>
+          <p:cNvPr id="87" name="Text 10">
+            <a:extLst>
+              <a:ext uri="{FF2B5EF4-FFF2-40B4-BE49-F238E27FC236}">
+                <a16:creationId xmlns:a16="http://schemas.microsoft.com/office/drawing/2014/main" id="{581D1718-B8A9-29E5-9C69-4FAB6BE99077}"/>
+              </a:ext>
+            </a:extLst>
+          </p:cNvPr>
+          <p:cNvSpPr txBox="1"/>
+          <p:nvPr/>
+        </p:nvSpPr>
+        <p:spPr>
+          <a:xfrm>
+            <a:off x="4747634" y="4165092"/>
+            <a:ext cx="1078992" cy="274320"/>
+          </a:xfrm>
+          <a:prstGeom prst="rect">
+            <a:avLst/>
+          </a:prstGeom>
+          <a:noFill/>
+          <a:ln/>
+        </p:spPr>
+        <p:txBody>
+          <a:bodyPr wrap="square" lIns="0" tIns="0" rIns="0" bIns="0" rtlCol="0" anchor="ctr"/>
+          <a:lstStyle/>
+          <a:p>
+            <a:pPr marL="0" indent="0">
+              <a:buNone/>
+            </a:pPr>
+            <a:r>
+              <a:rPr lang="en-US" sz="950" b="1" dirty="0">
+                <a:solidFill>
+                  <a:srgbClr val="E9970B"/>
+                </a:solidFill>
+                <a:latin typeface="Calibri" pitchFamily="34" charset="0"/>
+                <a:ea typeface="Calibri" pitchFamily="34" charset="-122"/>
+                <a:cs typeface="Calibri" pitchFamily="34" charset="-120"/>
+              </a:rPr>
+              <a:t>◀ đang ở đây</a:t>
+            </a:r>
+            <a:endParaRPr lang="en-US" sz="950" dirty="0"/>
+          </a:p>
+        </p:txBody>
+      </p:sp>
+      <p:sp>
+        <p:nvSpPr>
+          <p:cNvPr id="89" name="Shape 11">
+            <a:extLst>
+              <a:ext uri="{FF2B5EF4-FFF2-40B4-BE49-F238E27FC236}">
+                <a16:creationId xmlns:a16="http://schemas.microsoft.com/office/drawing/2014/main" id="{2803E927-4A04-E358-9E65-2EC54756AFFE}"/>
+              </a:ext>
+            </a:extLst>
+          </p:cNvPr>
+          <p:cNvSpPr/>
+          <p:nvPr/>
+        </p:nvSpPr>
+        <p:spPr>
+          <a:xfrm>
+            <a:off x="566928" y="2839816"/>
+            <a:ext cx="5340096" cy="932688"/>
+          </a:xfrm>
+          <a:prstGeom prst="roundRect">
+            <a:avLst>
+              <a:gd name="adj" fmla="val 4902"/>
+            </a:avLst>
+          </a:prstGeom>
+          <a:solidFill>
+            <a:srgbClr val="F1F2FB"/>
+          </a:solidFill>
+          <a:ln w="12700">
+            <a:solidFill>
+              <a:srgbClr val="F1F2FB"/>
+            </a:solidFill>
+            <a:prstDash val="solid"/>
+          </a:ln>
+        </p:spPr>
+        <p:txBody>
+          <a:bodyPr/>
+          <a:lstStyle/>
+          <a:p>
+            <a:endParaRPr lang="en-US"/>
+          </a:p>
+        </p:txBody>
+      </p:sp>
+      <p:sp>
+        <p:nvSpPr>
+          <p:cNvPr id="91" name="Shape 12">
+            <a:extLst>
+              <a:ext uri="{FF2B5EF4-FFF2-40B4-BE49-F238E27FC236}">
+                <a16:creationId xmlns:a16="http://schemas.microsoft.com/office/drawing/2014/main" id="{639628D0-CD50-3079-9383-FA3E6E0F1B19}"/>
+              </a:ext>
+            </a:extLst>
+          </p:cNvPr>
+          <p:cNvSpPr/>
+          <p:nvPr/>
+        </p:nvSpPr>
+        <p:spPr>
+          <a:xfrm>
+            <a:off x="749808" y="3022696"/>
+            <a:ext cx="960120" cy="566928"/>
+          </a:xfrm>
+          <a:prstGeom prst="roundRect">
+            <a:avLst>
+              <a:gd name="adj" fmla="val 12903"/>
+            </a:avLst>
+          </a:prstGeom>
+          <a:solidFill>
+            <a:srgbClr val="3A36A0"/>
+          </a:solidFill>
+          <a:ln w="12700">
+            <a:solidFill>
+              <a:srgbClr val="3A36A0"/>
+            </a:solidFill>
+            <a:prstDash val="solid"/>
+          </a:ln>
+        </p:spPr>
+        <p:txBody>
+          <a:bodyPr/>
+          <a:lstStyle/>
+          <a:p>
+            <a:endParaRPr lang="en-US"/>
+          </a:p>
+        </p:txBody>
+      </p:sp>
+      <p:sp>
+        <p:nvSpPr>
+          <p:cNvPr id="93" name="Text 13">
+            <a:extLst>
+              <a:ext uri="{FF2B5EF4-FFF2-40B4-BE49-F238E27FC236}">
+                <a16:creationId xmlns:a16="http://schemas.microsoft.com/office/drawing/2014/main" id="{06F3CA37-D31F-5868-D5A6-CC4EEA147C5E}"/>
+              </a:ext>
+            </a:extLst>
+          </p:cNvPr>
+          <p:cNvSpPr txBox="1"/>
+          <p:nvPr/>
+        </p:nvSpPr>
+        <p:spPr>
+          <a:xfrm>
+            <a:off x="749808" y="3022696"/>
+            <a:ext cx="960120" cy="566928"/>
+          </a:xfrm>
+          <a:prstGeom prst="rect">
+            <a:avLst/>
+          </a:prstGeom>
+          <a:noFill/>
+          <a:ln/>
+        </p:spPr>
+        <p:txBody>
+          <a:bodyPr wrap="square" lIns="0" tIns="0" rIns="0" bIns="0" rtlCol="0" anchor="ctr"/>
+          <a:lstStyle/>
+          <a:p>
+            <a:pPr marL="0" indent="0" algn="ctr">
+              <a:buNone/>
+            </a:pPr>
+            <a:r>
+              <a:rPr lang="en-US" sz="1400" b="1" dirty="0" err="1">
+                <a:solidFill>
+                  <a:srgbClr val="FFFFFF"/>
+                </a:solidFill>
+                <a:latin typeface="Calibri" pitchFamily="34" charset="0"/>
+                <a:ea typeface="Calibri" pitchFamily="34" charset="-122"/>
+                <a:cs typeface="Calibri" pitchFamily="34" charset="-120"/>
+              </a:rPr>
+              <a:t>Tuần</a:t>
+            </a:r>
+            <a:r>
+              <a:rPr lang="en-US" sz="1400" b="1" dirty="0">
+                <a:solidFill>
+                  <a:srgbClr val="FFFFFF"/>
+                </a:solidFill>
+                <a:latin typeface="Calibri" pitchFamily="34" charset="0"/>
+                <a:ea typeface="Calibri" pitchFamily="34" charset="-122"/>
+                <a:cs typeface="Calibri" pitchFamily="34" charset="-120"/>
+              </a:rPr>
+              <a:t> 2</a:t>
+            </a:r>
+            <a:endParaRPr lang="en-US" sz="1400" dirty="0"/>
+          </a:p>
+        </p:txBody>
+      </p:sp>
+      <p:sp>
+        <p:nvSpPr>
+          <p:cNvPr id="95" name="Text 14">
+            <a:extLst>
+              <a:ext uri="{FF2B5EF4-FFF2-40B4-BE49-F238E27FC236}">
+                <a16:creationId xmlns:a16="http://schemas.microsoft.com/office/drawing/2014/main" id="{435FA8AD-7761-F1F3-A1A1-B287FB6D3C3F}"/>
+              </a:ext>
+            </a:extLst>
+          </p:cNvPr>
+          <p:cNvSpPr txBox="1"/>
+          <p:nvPr/>
+        </p:nvSpPr>
+        <p:spPr>
+          <a:xfrm>
+            <a:off x="1865376" y="2958688"/>
+            <a:ext cx="3886200" cy="731520"/>
+          </a:xfrm>
+          <a:prstGeom prst="rect">
+            <a:avLst/>
+          </a:prstGeom>
+          <a:noFill/>
+          <a:ln/>
+        </p:spPr>
+        <p:txBody>
+          <a:bodyPr wrap="square" lIns="0" tIns="0" rIns="0" bIns="0" rtlCol="0" anchor="ctr"/>
+          <a:lstStyle/>
+          <a:p>
+            <a:pPr>
+              <a:lnSpc>
+                <a:spcPct val="95000"/>
+              </a:lnSpc>
+            </a:pPr>
+            <a:r>
+              <a:rPr lang="en-US" sz="1180" dirty="0" err="1">
+                <a:latin typeface="Calibri" pitchFamily="34" charset="0"/>
+                <a:ea typeface="Calibri" pitchFamily="34" charset="-122"/>
+                <a:cs typeface="Calibri" pitchFamily="34" charset="-120"/>
+              </a:rPr>
+              <a:t>Rà</a:t>
+            </a:r>
+            <a:r>
+              <a:rPr lang="en-US" sz="1180" dirty="0">
+                <a:latin typeface="Calibri" pitchFamily="34" charset="0"/>
+                <a:ea typeface="Calibri" pitchFamily="34" charset="-122"/>
+                <a:cs typeface="Calibri" pitchFamily="34" charset="-120"/>
+              </a:rPr>
+              <a:t> </a:t>
+            </a:r>
+            <a:r>
+              <a:rPr lang="en-US" sz="1180" dirty="0" err="1">
+                <a:latin typeface="Calibri" pitchFamily="34" charset="0"/>
+                <a:ea typeface="Calibri" pitchFamily="34" charset="-122"/>
+                <a:cs typeface="Calibri" pitchFamily="34" charset="-120"/>
+              </a:rPr>
+              <a:t>soát</a:t>
+            </a:r>
+            <a:r>
+              <a:rPr lang="en-US" sz="1180" dirty="0">
+                <a:latin typeface="Calibri" pitchFamily="34" charset="0"/>
+                <a:ea typeface="Calibri" pitchFamily="34" charset="-122"/>
+                <a:cs typeface="Calibri" pitchFamily="34" charset="-120"/>
+              </a:rPr>
+              <a:t> benchmark; </a:t>
+            </a:r>
+            <a:r>
+              <a:rPr lang="en-US" sz="1180" dirty="0" err="1">
+                <a:latin typeface="Calibri" pitchFamily="34" charset="0"/>
+                <a:ea typeface="Calibri" pitchFamily="34" charset="-122"/>
+                <a:cs typeface="Calibri" pitchFamily="34" charset="-120"/>
+              </a:rPr>
+              <a:t>khung</a:t>
+            </a:r>
+            <a:r>
+              <a:rPr lang="en-US" sz="1180" dirty="0">
+                <a:latin typeface="Calibri" pitchFamily="34" charset="0"/>
+                <a:ea typeface="Calibri" pitchFamily="34" charset="-122"/>
+                <a:cs typeface="Calibri" pitchFamily="34" charset="-120"/>
+              </a:rPr>
+              <a:t> </a:t>
+            </a:r>
+            <a:r>
+              <a:rPr lang="en-US" sz="1180" dirty="0" err="1">
+                <a:latin typeface="Calibri" pitchFamily="34" charset="0"/>
+                <a:ea typeface="Calibri" pitchFamily="34" charset="-122"/>
+                <a:cs typeface="Calibri" pitchFamily="34" charset="-120"/>
+              </a:rPr>
+              <a:t>năng</a:t>
+            </a:r>
+            <a:r>
+              <a:rPr lang="en-US" sz="1180" dirty="0">
+                <a:latin typeface="Calibri" pitchFamily="34" charset="0"/>
+                <a:ea typeface="Calibri" pitchFamily="34" charset="-122"/>
+                <a:cs typeface="Calibri" pitchFamily="34" charset="-120"/>
+              </a:rPr>
+              <a:t> </a:t>
+            </a:r>
+            <a:r>
+              <a:rPr lang="en-US" sz="1180" dirty="0" err="1">
+                <a:latin typeface="Calibri" pitchFamily="34" charset="0"/>
+                <a:ea typeface="Calibri" pitchFamily="34" charset="-122"/>
+                <a:cs typeface="Calibri" pitchFamily="34" charset="-120"/>
+              </a:rPr>
+              <a:t>lực</a:t>
+            </a:r>
+            <a:r>
+              <a:rPr lang="en-US" sz="1180" dirty="0">
+                <a:latin typeface="Calibri" pitchFamily="34" charset="0"/>
+                <a:ea typeface="Calibri" pitchFamily="34" charset="-122"/>
+                <a:cs typeface="Calibri" pitchFamily="34" charset="-120"/>
+              </a:rPr>
+              <a:t>; </a:t>
+            </a:r>
+            <a:r>
+              <a:rPr lang="en-US" sz="1180" dirty="0" err="1">
+                <a:latin typeface="Calibri" pitchFamily="34" charset="0"/>
+                <a:ea typeface="Calibri" pitchFamily="34" charset="-122"/>
+                <a:cs typeface="Calibri" pitchFamily="34" charset="-120"/>
+              </a:rPr>
+              <a:t>kiến</a:t>
+            </a:r>
+            <a:r>
+              <a:rPr lang="en-US" sz="1180" dirty="0">
+                <a:latin typeface="Calibri" pitchFamily="34" charset="0"/>
+                <a:ea typeface="Calibri" pitchFamily="34" charset="-122"/>
+                <a:cs typeface="Calibri" pitchFamily="34" charset="-120"/>
+              </a:rPr>
+              <a:t> </a:t>
+            </a:r>
+            <a:r>
+              <a:rPr lang="en-US" sz="1180" dirty="0" err="1">
+                <a:latin typeface="Calibri" pitchFamily="34" charset="0"/>
+                <a:ea typeface="Calibri" pitchFamily="34" charset="-122"/>
+                <a:cs typeface="Calibri" pitchFamily="34" charset="-120"/>
+              </a:rPr>
+              <a:t>trúc</a:t>
+            </a:r>
+            <a:r>
+              <a:rPr lang="en-US" sz="1180" dirty="0">
+                <a:latin typeface="Calibri" pitchFamily="34" charset="0"/>
+                <a:ea typeface="Calibri" pitchFamily="34" charset="-122"/>
+                <a:cs typeface="Calibri" pitchFamily="34" charset="-120"/>
+              </a:rPr>
+              <a:t> </a:t>
+            </a:r>
+            <a:r>
+              <a:rPr lang="en-US" sz="1180" dirty="0" err="1">
+                <a:latin typeface="Calibri" pitchFamily="34" charset="0"/>
+                <a:ea typeface="Calibri" pitchFamily="34" charset="-122"/>
+                <a:cs typeface="Calibri" pitchFamily="34" charset="-120"/>
+              </a:rPr>
+              <a:t>phân</a:t>
+            </a:r>
+            <a:r>
+              <a:rPr lang="en-US" sz="1180" dirty="0">
+                <a:latin typeface="Calibri" pitchFamily="34" charset="0"/>
+                <a:ea typeface="Calibri" pitchFamily="34" charset="-122"/>
+                <a:cs typeface="Calibri" pitchFamily="34" charset="-120"/>
+              </a:rPr>
+              <a:t> </a:t>
+            </a:r>
+            <a:r>
+              <a:rPr lang="en-US" sz="1180" dirty="0" err="1">
+                <a:latin typeface="Calibri" pitchFamily="34" charset="0"/>
+                <a:ea typeface="Calibri" pitchFamily="34" charset="-122"/>
+                <a:cs typeface="Calibri" pitchFamily="34" charset="-120"/>
+              </a:rPr>
+              <a:t>lớp</a:t>
+            </a:r>
+            <a:r>
+              <a:rPr lang="en-US" sz="1180" dirty="0">
+                <a:latin typeface="Calibri" pitchFamily="34" charset="0"/>
+                <a:ea typeface="Calibri" pitchFamily="34" charset="-122"/>
+                <a:cs typeface="Calibri" pitchFamily="34" charset="-120"/>
+              </a:rPr>
+              <a:t>; </a:t>
+            </a:r>
+            <a:r>
+              <a:rPr lang="en-US" sz="1180" dirty="0" err="1">
+                <a:latin typeface="Calibri" pitchFamily="34" charset="0"/>
+                <a:ea typeface="Calibri" pitchFamily="34" charset="-122"/>
+                <a:cs typeface="Calibri" pitchFamily="34" charset="-120"/>
+              </a:rPr>
+              <a:t>chốt</a:t>
+            </a:r>
+            <a:r>
+              <a:rPr lang="en-US" sz="1180" dirty="0">
+                <a:latin typeface="Calibri" pitchFamily="34" charset="0"/>
+                <a:ea typeface="Calibri" pitchFamily="34" charset="-122"/>
+                <a:cs typeface="Calibri" pitchFamily="34" charset="-120"/>
+              </a:rPr>
+              <a:t> </a:t>
+            </a:r>
+            <a:r>
+              <a:rPr lang="en-US" sz="1180" dirty="0" err="1">
+                <a:latin typeface="Calibri" pitchFamily="34" charset="0"/>
+                <a:ea typeface="Calibri" pitchFamily="34" charset="-122"/>
+                <a:cs typeface="Calibri" pitchFamily="34" charset="-120"/>
+              </a:rPr>
+              <a:t>công</a:t>
+            </a:r>
+            <a:r>
+              <a:rPr lang="en-US" sz="1180" dirty="0">
+                <a:latin typeface="Calibri" pitchFamily="34" charset="0"/>
+                <a:ea typeface="Calibri" pitchFamily="34" charset="-122"/>
+                <a:cs typeface="Calibri" pitchFamily="34" charset="-120"/>
+              </a:rPr>
+              <a:t> </a:t>
+            </a:r>
+            <a:r>
+              <a:rPr lang="en-US" sz="1180" dirty="0" err="1">
+                <a:latin typeface="Calibri" pitchFamily="34" charset="0"/>
+                <a:ea typeface="Calibri" pitchFamily="34" charset="-122"/>
+                <a:cs typeface="Calibri" pitchFamily="34" charset="-120"/>
+              </a:rPr>
+              <a:t>nghệ</a:t>
+            </a:r>
+            <a:r>
+              <a:rPr lang="en-US" sz="1180" dirty="0">
+                <a:latin typeface="Calibri" pitchFamily="34" charset="0"/>
+                <a:ea typeface="Calibri" pitchFamily="34" charset="-122"/>
+                <a:cs typeface="Calibri" pitchFamily="34" charset="-120"/>
+              </a:rPr>
+              <a:t>.</a:t>
+            </a:r>
+            <a:endParaRPr lang="en-US" sz="1180" dirty="0"/>
+          </a:p>
+        </p:txBody>
+      </p:sp>
+      <p:sp>
+        <p:nvSpPr>
+          <p:cNvPr id="97" name="Shape 15">
+            <a:extLst>
+              <a:ext uri="{FF2B5EF4-FFF2-40B4-BE49-F238E27FC236}">
+                <a16:creationId xmlns:a16="http://schemas.microsoft.com/office/drawing/2014/main" id="{C05A664E-EF36-2E26-0AB8-4FE3BA6E23B5}"/>
+              </a:ext>
+            </a:extLst>
+          </p:cNvPr>
+          <p:cNvSpPr/>
+          <p:nvPr/>
+        </p:nvSpPr>
+        <p:spPr>
+          <a:xfrm>
+            <a:off x="566928" y="4855464"/>
+            <a:ext cx="5340096" cy="932688"/>
+          </a:xfrm>
+          <a:prstGeom prst="roundRect">
+            <a:avLst>
+              <a:gd name="adj" fmla="val 4902"/>
+            </a:avLst>
+          </a:prstGeom>
+          <a:solidFill>
+            <a:srgbClr val="F1F2FB"/>
+          </a:solidFill>
+          <a:ln w="12700">
+            <a:solidFill>
+              <a:srgbClr val="F1F2FB"/>
+            </a:solidFill>
+            <a:prstDash val="solid"/>
+          </a:ln>
+        </p:spPr>
+        <p:txBody>
+          <a:bodyPr/>
+          <a:lstStyle/>
+          <a:p>
+            <a:endParaRPr lang="en-US"/>
+          </a:p>
+        </p:txBody>
+      </p:sp>
+      <p:sp>
+        <p:nvSpPr>
+          <p:cNvPr id="99" name="Shape 16">
+            <a:extLst>
+              <a:ext uri="{FF2B5EF4-FFF2-40B4-BE49-F238E27FC236}">
+                <a16:creationId xmlns:a16="http://schemas.microsoft.com/office/drawing/2014/main" id="{D43CEFE4-1CA0-A20D-B93C-EE955F11AF59}"/>
+              </a:ext>
+            </a:extLst>
+          </p:cNvPr>
+          <p:cNvSpPr/>
+          <p:nvPr/>
+        </p:nvSpPr>
+        <p:spPr>
+          <a:xfrm>
+            <a:off x="749808" y="5038344"/>
+            <a:ext cx="960120" cy="566928"/>
+          </a:xfrm>
+          <a:prstGeom prst="roundRect">
+            <a:avLst>
+              <a:gd name="adj" fmla="val 12903"/>
+            </a:avLst>
+          </a:prstGeom>
+          <a:solidFill>
+            <a:srgbClr val="3A36A0"/>
+          </a:solidFill>
+          <a:ln w="12700">
+            <a:solidFill>
+              <a:srgbClr val="3A36A0"/>
+            </a:solidFill>
+            <a:prstDash val="solid"/>
+          </a:ln>
+        </p:spPr>
+        <p:txBody>
+          <a:bodyPr/>
+          <a:lstStyle/>
+          <a:p>
+            <a:endParaRPr lang="en-US"/>
+          </a:p>
+        </p:txBody>
+      </p:sp>
+      <p:sp>
+        <p:nvSpPr>
+          <p:cNvPr id="101" name="Text 17">
+            <a:extLst>
+              <a:ext uri="{FF2B5EF4-FFF2-40B4-BE49-F238E27FC236}">
+                <a16:creationId xmlns:a16="http://schemas.microsoft.com/office/drawing/2014/main" id="{BB5A8E87-AF13-3F96-6A5F-FFFF0AABD3B0}"/>
+              </a:ext>
+            </a:extLst>
+          </p:cNvPr>
+          <p:cNvSpPr txBox="1"/>
+          <p:nvPr/>
+        </p:nvSpPr>
+        <p:spPr>
+          <a:xfrm>
+            <a:off x="749808" y="5038344"/>
+            <a:ext cx="960120" cy="566928"/>
+          </a:xfrm>
+          <a:prstGeom prst="rect">
+            <a:avLst/>
+          </a:prstGeom>
+          <a:noFill/>
+          <a:ln/>
+        </p:spPr>
+        <p:txBody>
+          <a:bodyPr wrap="square" lIns="0" tIns="0" rIns="0" bIns="0" rtlCol="0" anchor="ctr"/>
+          <a:lstStyle/>
+          <a:p>
+            <a:pPr marL="0" indent="0" algn="ctr">
+              <a:buNone/>
+            </a:pPr>
+            <a:r>
+              <a:rPr lang="en-US" sz="1400" b="1" dirty="0">
+                <a:solidFill>
+                  <a:srgbClr val="FFFFFF"/>
+                </a:solidFill>
+                <a:latin typeface="Calibri" pitchFamily="34" charset="0"/>
+                <a:ea typeface="Calibri" pitchFamily="34" charset="-122"/>
+                <a:cs typeface="Calibri" pitchFamily="34" charset="-120"/>
+              </a:rPr>
+              <a:t>Tuần 4</a:t>
+            </a:r>
+            <a:endParaRPr lang="en-US" sz="1400" dirty="0"/>
+          </a:p>
+        </p:txBody>
+      </p:sp>
+      <p:sp>
+        <p:nvSpPr>
+          <p:cNvPr id="103" name="Text 18">
+            <a:extLst>
+              <a:ext uri="{FF2B5EF4-FFF2-40B4-BE49-F238E27FC236}">
+                <a16:creationId xmlns:a16="http://schemas.microsoft.com/office/drawing/2014/main" id="{58FBE783-BB58-9BC8-910C-3BEE2FBC2B7E}"/>
+              </a:ext>
+            </a:extLst>
+          </p:cNvPr>
+          <p:cNvSpPr txBox="1"/>
+          <p:nvPr/>
+        </p:nvSpPr>
+        <p:spPr>
+          <a:xfrm>
+            <a:off x="1865376" y="4974336"/>
+            <a:ext cx="3886200" cy="731520"/>
+          </a:xfrm>
+          <a:prstGeom prst="rect">
+            <a:avLst/>
+          </a:prstGeom>
+          <a:noFill/>
+          <a:ln/>
+        </p:spPr>
+        <p:txBody>
+          <a:bodyPr wrap="square" lIns="0" tIns="0" rIns="0" bIns="0" rtlCol="0" anchor="ctr"/>
+          <a:lstStyle/>
+          <a:p>
+            <a:pPr>
+              <a:lnSpc>
+                <a:spcPct val="95000"/>
+              </a:lnSpc>
+            </a:pPr>
+            <a:r>
+              <a:rPr lang="en-US" sz="1180" dirty="0"/>
+              <a:t>Implement vector </a:t>
+            </a:r>
+            <a:r>
+              <a:rPr lang="en-US" sz="1180" dirty="0" err="1"/>
+              <a:t>db</a:t>
+            </a:r>
+            <a:r>
+              <a:rPr lang="en-US" sz="1180" dirty="0"/>
+              <a:t> </a:t>
+            </a:r>
+            <a:r>
+              <a:rPr lang="en-US" sz="1180" dirty="0" err="1"/>
+              <a:t>và</a:t>
+            </a:r>
+            <a:r>
+              <a:rPr lang="en-US" sz="1180" dirty="0"/>
+              <a:t> </a:t>
+            </a:r>
+            <a:r>
+              <a:rPr lang="en-US" sz="1180" dirty="0" err="1"/>
+              <a:t>các</a:t>
+            </a:r>
+            <a:r>
+              <a:rPr lang="en-US" sz="1180" dirty="0"/>
+              <a:t> tools </a:t>
+            </a:r>
+            <a:r>
+              <a:rPr lang="en-US" sz="1180" dirty="0" err="1"/>
+              <a:t>cho</a:t>
+            </a:r>
+            <a:r>
+              <a:rPr lang="en-US" sz="1180" dirty="0"/>
+              <a:t> agent, </a:t>
+            </a:r>
+            <a:r>
+              <a:rPr lang="en-US" sz="1180" dirty="0" err="1"/>
+              <a:t>chạy</a:t>
+            </a:r>
+            <a:r>
+              <a:rPr lang="en-US" sz="1180" dirty="0"/>
+              <a:t> </a:t>
+            </a:r>
+            <a:r>
+              <a:rPr lang="en-US" sz="1180" dirty="0" err="1"/>
+              <a:t>thử</a:t>
+            </a:r>
+            <a:r>
+              <a:rPr lang="en-US" sz="1180" dirty="0"/>
+              <a:t> </a:t>
+            </a:r>
+            <a:r>
+              <a:rPr lang="en-US" sz="1180" dirty="0" err="1"/>
+              <a:t>nghiệm</a:t>
+            </a:r>
+            <a:r>
+              <a:rPr lang="en-US" sz="1180" dirty="0"/>
+              <a:t> </a:t>
+            </a:r>
+            <a:r>
+              <a:rPr lang="en-US" sz="1180" dirty="0" err="1"/>
+              <a:t>các</a:t>
+            </a:r>
+            <a:r>
+              <a:rPr lang="en-US" sz="1180" dirty="0"/>
+              <a:t> paper </a:t>
+            </a:r>
+            <a:r>
+              <a:rPr lang="en-US" sz="1180" dirty="0" err="1"/>
+              <a:t>và</a:t>
+            </a:r>
+            <a:r>
+              <a:rPr lang="en-US" sz="1180" dirty="0"/>
+              <a:t> baseline </a:t>
+            </a:r>
+            <a:r>
+              <a:rPr lang="en-US" sz="1180" dirty="0" err="1"/>
+              <a:t>có</a:t>
+            </a:r>
+            <a:r>
+              <a:rPr lang="en-US" sz="1180" dirty="0"/>
+              <a:t> </a:t>
+            </a:r>
+            <a:r>
+              <a:rPr lang="en-US" sz="1180" dirty="0" err="1"/>
+              <a:t>sẵn</a:t>
+            </a:r>
+            <a:r>
+              <a:rPr lang="en-US" sz="1180" dirty="0"/>
+              <a:t>.</a:t>
+            </a:r>
+          </a:p>
+        </p:txBody>
+      </p:sp>
+      <p:sp>
+        <p:nvSpPr>
+          <p:cNvPr id="105" name="Shape 19">
+            <a:extLst>
+              <a:ext uri="{FF2B5EF4-FFF2-40B4-BE49-F238E27FC236}">
+                <a16:creationId xmlns:a16="http://schemas.microsoft.com/office/drawing/2014/main" id="{0B2D5611-F30E-1B61-1627-08A0011C8017}"/>
+              </a:ext>
+            </a:extLst>
+          </p:cNvPr>
+          <p:cNvSpPr/>
+          <p:nvPr/>
+        </p:nvSpPr>
+        <p:spPr>
+          <a:xfrm>
+            <a:off x="6281928" y="1783080"/>
+            <a:ext cx="5340096" cy="932688"/>
+          </a:xfrm>
+          <a:prstGeom prst="roundRect">
+            <a:avLst>
+              <a:gd name="adj" fmla="val 4902"/>
+            </a:avLst>
+          </a:prstGeom>
+          <a:solidFill>
+            <a:srgbClr val="F1F2FB"/>
+          </a:solidFill>
+          <a:ln w="12700">
+            <a:solidFill>
+              <a:srgbClr val="F1F2FB"/>
+            </a:solidFill>
+            <a:prstDash val="solid"/>
+          </a:ln>
+        </p:spPr>
+        <p:txBody>
+          <a:bodyPr/>
+          <a:lstStyle/>
+          <a:p>
+            <a:endParaRPr lang="en-US"/>
+          </a:p>
+        </p:txBody>
+      </p:sp>
+      <p:sp>
+        <p:nvSpPr>
+          <p:cNvPr id="107" name="Shape 20">
+            <a:extLst>
+              <a:ext uri="{FF2B5EF4-FFF2-40B4-BE49-F238E27FC236}">
+                <a16:creationId xmlns:a16="http://schemas.microsoft.com/office/drawing/2014/main" id="{C2C8FD23-B296-EDDE-72CF-622CBCDD3C52}"/>
+              </a:ext>
+            </a:extLst>
+          </p:cNvPr>
+          <p:cNvSpPr/>
+          <p:nvPr/>
+        </p:nvSpPr>
+        <p:spPr>
+          <a:xfrm>
+            <a:off x="6464808" y="1965960"/>
+            <a:ext cx="960120" cy="566928"/>
+          </a:xfrm>
+          <a:prstGeom prst="roundRect">
+            <a:avLst>
+              <a:gd name="adj" fmla="val 12903"/>
+            </a:avLst>
+          </a:prstGeom>
+          <a:solidFill>
+            <a:srgbClr val="3A36A0"/>
+          </a:solidFill>
+          <a:ln w="12700">
+            <a:solidFill>
+              <a:srgbClr val="3A36A0"/>
+            </a:solidFill>
+            <a:prstDash val="solid"/>
+          </a:ln>
+        </p:spPr>
+        <p:txBody>
+          <a:bodyPr/>
+          <a:lstStyle/>
+          <a:p>
+            <a:endParaRPr lang="en-US"/>
+          </a:p>
+        </p:txBody>
+      </p:sp>
+      <p:sp>
+        <p:nvSpPr>
+          <p:cNvPr id="109" name="Text 21">
+            <a:extLst>
+              <a:ext uri="{FF2B5EF4-FFF2-40B4-BE49-F238E27FC236}">
+                <a16:creationId xmlns:a16="http://schemas.microsoft.com/office/drawing/2014/main" id="{EE2C758D-D608-1603-8637-36FEA19E4B5F}"/>
+              </a:ext>
+            </a:extLst>
+          </p:cNvPr>
+          <p:cNvSpPr txBox="1"/>
+          <p:nvPr/>
+        </p:nvSpPr>
+        <p:spPr>
+          <a:xfrm>
+            <a:off x="6464808" y="1965960"/>
+            <a:ext cx="960120" cy="566928"/>
+          </a:xfrm>
+          <a:prstGeom prst="rect">
+            <a:avLst/>
+          </a:prstGeom>
+          <a:noFill/>
+          <a:ln/>
+        </p:spPr>
+        <p:txBody>
+          <a:bodyPr wrap="square" lIns="0" tIns="0" rIns="0" bIns="0" rtlCol="0" anchor="ctr"/>
+          <a:lstStyle/>
+          <a:p>
+            <a:pPr marL="0" indent="0" algn="ctr">
+              <a:buNone/>
+            </a:pPr>
+            <a:r>
+              <a:rPr lang="en-US" sz="1400" b="1" dirty="0">
+                <a:solidFill>
+                  <a:srgbClr val="FFFFFF"/>
+                </a:solidFill>
+                <a:latin typeface="Calibri" pitchFamily="34" charset="0"/>
+                <a:ea typeface="Calibri" pitchFamily="34" charset="-122"/>
+                <a:cs typeface="Calibri" pitchFamily="34" charset="-120"/>
+              </a:rPr>
+              <a:t>Tuần 5</a:t>
+            </a:r>
+            <a:endParaRPr lang="en-US" sz="1400" dirty="0"/>
+          </a:p>
+        </p:txBody>
+      </p:sp>
+      <p:sp>
+        <p:nvSpPr>
+          <p:cNvPr id="111" name="Text 22">
+            <a:extLst>
+              <a:ext uri="{FF2B5EF4-FFF2-40B4-BE49-F238E27FC236}">
+                <a16:creationId xmlns:a16="http://schemas.microsoft.com/office/drawing/2014/main" id="{5AAB0A85-0DEA-35F0-8FBA-F30EDBCD050F}"/>
+              </a:ext>
+            </a:extLst>
+          </p:cNvPr>
+          <p:cNvSpPr txBox="1"/>
+          <p:nvPr/>
+        </p:nvSpPr>
+        <p:spPr>
+          <a:xfrm>
+            <a:off x="7580376" y="1901952"/>
+            <a:ext cx="3886200" cy="731520"/>
+          </a:xfrm>
+          <a:prstGeom prst="rect">
+            <a:avLst/>
+          </a:prstGeom>
+          <a:noFill/>
+          <a:ln/>
+        </p:spPr>
+        <p:txBody>
+          <a:bodyPr wrap="square" lIns="0" tIns="0" rIns="0" bIns="0" rtlCol="0" anchor="ctr"/>
+          <a:lstStyle/>
+          <a:p>
+            <a:pPr>
+              <a:lnSpc>
+                <a:spcPct val="95000"/>
+              </a:lnSpc>
+            </a:pPr>
+            <a:r>
+              <a:rPr lang="en-US" sz="1180" dirty="0"/>
+              <a:t>Hoàn </a:t>
+            </a:r>
+            <a:r>
+              <a:rPr lang="en-US" sz="1180" dirty="0" err="1"/>
+              <a:t>thiện</a:t>
+            </a:r>
+            <a:r>
+              <a:rPr lang="en-US" sz="1180" dirty="0"/>
+              <a:t> </a:t>
+            </a:r>
+            <a:r>
+              <a:rPr lang="en-US" sz="1180" dirty="0" err="1"/>
+              <a:t>hệ</a:t>
+            </a:r>
+            <a:r>
+              <a:rPr lang="en-US" sz="1180" dirty="0"/>
+              <a:t> </a:t>
+            </a:r>
+            <a:r>
+              <a:rPr lang="en-US" sz="1180" dirty="0" err="1"/>
+              <a:t>thống</a:t>
+            </a:r>
+            <a:r>
+              <a:rPr lang="en-US" sz="1180" dirty="0"/>
+              <a:t>, </a:t>
+            </a:r>
+            <a:r>
+              <a:rPr lang="en-US" sz="1180" dirty="0" err="1"/>
+              <a:t>thử</a:t>
+            </a:r>
+            <a:r>
+              <a:rPr lang="en-US" sz="1180" dirty="0"/>
+              <a:t> benchmark </a:t>
+            </a:r>
+            <a:r>
+              <a:rPr lang="en-US" sz="1180" dirty="0" err="1"/>
+              <a:t>trên</a:t>
+            </a:r>
+            <a:r>
+              <a:rPr lang="en-US" sz="1180" dirty="0"/>
+              <a:t> </a:t>
+            </a:r>
+            <a:r>
+              <a:rPr lang="en-US" sz="1180" dirty="0" err="1"/>
+              <a:t>bộ</a:t>
+            </a:r>
+            <a:r>
+              <a:rPr lang="en-US" sz="1180" dirty="0"/>
+              <a:t> dev </a:t>
+            </a:r>
+            <a:r>
+              <a:rPr lang="en-US" sz="1180" dirty="0" err="1"/>
+              <a:t>để</a:t>
+            </a:r>
+            <a:r>
+              <a:rPr lang="en-US" sz="1180" dirty="0"/>
+              <a:t> </a:t>
+            </a:r>
+            <a:r>
+              <a:rPr lang="en-US" sz="1180" dirty="0" err="1"/>
+              <a:t>tối</a:t>
+            </a:r>
+            <a:r>
+              <a:rPr lang="en-US" sz="1180" dirty="0"/>
+              <a:t> </a:t>
+            </a:r>
+            <a:r>
+              <a:rPr lang="vi-VN" sz="1180" dirty="0"/>
+              <a:t>ư</a:t>
+            </a:r>
+            <a:r>
+              <a:rPr lang="en-US" sz="1180" dirty="0"/>
+              <a:t>u </a:t>
+            </a:r>
+            <a:r>
+              <a:rPr lang="en-US" sz="1180" dirty="0" err="1"/>
+              <a:t>tham</a:t>
+            </a:r>
+            <a:r>
+              <a:rPr lang="en-US" sz="1180" dirty="0"/>
+              <a:t> </a:t>
+            </a:r>
+            <a:r>
+              <a:rPr lang="en-US" sz="1180" dirty="0" err="1"/>
+              <a:t>số</a:t>
+            </a:r>
+            <a:r>
+              <a:rPr lang="en-US" sz="1180" dirty="0"/>
+              <a:t> </a:t>
+            </a:r>
+            <a:r>
+              <a:rPr lang="en-US" sz="1180" dirty="0" err="1"/>
+              <a:t>và</a:t>
+            </a:r>
+            <a:r>
+              <a:rPr lang="en-US" sz="1180" dirty="0"/>
+              <a:t> </a:t>
+            </a:r>
+            <a:r>
+              <a:rPr lang="en-US" sz="1180" dirty="0" err="1"/>
+              <a:t>độ</a:t>
+            </a:r>
+            <a:r>
+              <a:rPr lang="en-US" sz="1180" dirty="0"/>
+              <a:t> </a:t>
+            </a:r>
+            <a:r>
+              <a:rPr lang="en-US" sz="1180" dirty="0" err="1"/>
+              <a:t>chính</a:t>
+            </a:r>
+            <a:r>
+              <a:rPr lang="en-US" sz="1180" dirty="0"/>
+              <a:t> </a:t>
+            </a:r>
+            <a:r>
+              <a:rPr lang="en-US" sz="1180" dirty="0" err="1"/>
+              <a:t>xác</a:t>
+            </a:r>
+            <a:r>
+              <a:rPr lang="en-US" sz="1180"/>
+              <a:t>.</a:t>
+            </a:r>
+            <a:endParaRPr lang="en-US" sz="1180" dirty="0"/>
+          </a:p>
+        </p:txBody>
+      </p:sp>
+      <p:sp>
+        <p:nvSpPr>
+          <p:cNvPr id="113" name="Shape 23">
+            <a:extLst>
+              <a:ext uri="{FF2B5EF4-FFF2-40B4-BE49-F238E27FC236}">
+                <a16:creationId xmlns:a16="http://schemas.microsoft.com/office/drawing/2014/main" id="{578B9B87-5047-7816-C9D8-E42A4CF9EF73}"/>
+              </a:ext>
+            </a:extLst>
+          </p:cNvPr>
+          <p:cNvSpPr/>
+          <p:nvPr/>
+        </p:nvSpPr>
+        <p:spPr>
+          <a:xfrm>
+            <a:off x="6281928" y="2807208"/>
+            <a:ext cx="5340096" cy="932688"/>
+          </a:xfrm>
+          <a:prstGeom prst="roundRect">
+            <a:avLst>
+              <a:gd name="adj" fmla="val 4902"/>
+            </a:avLst>
+          </a:prstGeom>
+          <a:solidFill>
+            <a:srgbClr val="F1F2FB"/>
+          </a:solidFill>
+          <a:ln w="12700">
+            <a:solidFill>
+              <a:srgbClr val="F1F2FB"/>
+            </a:solidFill>
+            <a:prstDash val="solid"/>
+          </a:ln>
+        </p:spPr>
+        <p:txBody>
+          <a:bodyPr/>
+          <a:lstStyle/>
+          <a:p>
+            <a:endParaRPr lang="en-US"/>
+          </a:p>
+        </p:txBody>
+      </p:sp>
+      <p:sp>
+        <p:nvSpPr>
+          <p:cNvPr id="115" name="Shape 24">
+            <a:extLst>
+              <a:ext uri="{FF2B5EF4-FFF2-40B4-BE49-F238E27FC236}">
+                <a16:creationId xmlns:a16="http://schemas.microsoft.com/office/drawing/2014/main" id="{B48B56D0-AB11-4C88-DB2F-B227E2A41144}"/>
+              </a:ext>
+            </a:extLst>
+          </p:cNvPr>
+          <p:cNvSpPr/>
+          <p:nvPr/>
+        </p:nvSpPr>
+        <p:spPr>
+          <a:xfrm>
+            <a:off x="6464808" y="2990088"/>
+            <a:ext cx="960120" cy="566928"/>
+          </a:xfrm>
+          <a:prstGeom prst="roundRect">
+            <a:avLst>
+              <a:gd name="adj" fmla="val 12903"/>
+            </a:avLst>
+          </a:prstGeom>
+          <a:solidFill>
+            <a:srgbClr val="3A36A0"/>
+          </a:solidFill>
+          <a:ln w="12700">
+            <a:solidFill>
+              <a:srgbClr val="3A36A0"/>
+            </a:solidFill>
+            <a:prstDash val="solid"/>
+          </a:ln>
+        </p:spPr>
+        <p:txBody>
+          <a:bodyPr/>
+          <a:lstStyle/>
+          <a:p>
+            <a:endParaRPr lang="en-US"/>
+          </a:p>
+        </p:txBody>
+      </p:sp>
+      <p:sp>
+        <p:nvSpPr>
+          <p:cNvPr id="117" name="Text 25">
+            <a:extLst>
+              <a:ext uri="{FF2B5EF4-FFF2-40B4-BE49-F238E27FC236}">
+                <a16:creationId xmlns:a16="http://schemas.microsoft.com/office/drawing/2014/main" id="{6E9D9832-3D5C-77A5-2A58-6FB65F62A894}"/>
+              </a:ext>
+            </a:extLst>
+          </p:cNvPr>
+          <p:cNvSpPr txBox="1"/>
+          <p:nvPr/>
+        </p:nvSpPr>
+        <p:spPr>
+          <a:xfrm>
+            <a:off x="6464808" y="2990088"/>
+            <a:ext cx="960120" cy="566928"/>
+          </a:xfrm>
+          <a:prstGeom prst="rect">
+            <a:avLst/>
+          </a:prstGeom>
+          <a:noFill/>
+          <a:ln/>
+        </p:spPr>
+        <p:txBody>
+          <a:bodyPr wrap="square" lIns="0" tIns="0" rIns="0" bIns="0" rtlCol="0" anchor="ctr"/>
+          <a:lstStyle/>
+          <a:p>
+            <a:pPr marL="0" indent="0" algn="ctr">
+              <a:buNone/>
+            </a:pPr>
+            <a:r>
+              <a:rPr lang="en-US" sz="1400" b="1" dirty="0">
+                <a:solidFill>
+                  <a:srgbClr val="FFFFFF"/>
+                </a:solidFill>
+                <a:latin typeface="Calibri" pitchFamily="34" charset="0"/>
+                <a:ea typeface="Calibri" pitchFamily="34" charset="-122"/>
+                <a:cs typeface="Calibri" pitchFamily="34" charset="-120"/>
+              </a:rPr>
+              <a:t>Tuần 6</a:t>
+            </a:r>
+            <a:endParaRPr lang="en-US" sz="1400" dirty="0"/>
+          </a:p>
+        </p:txBody>
+      </p:sp>
+      <p:sp>
+        <p:nvSpPr>
+          <p:cNvPr id="119" name="Text 26">
+            <a:extLst>
+              <a:ext uri="{FF2B5EF4-FFF2-40B4-BE49-F238E27FC236}">
+                <a16:creationId xmlns:a16="http://schemas.microsoft.com/office/drawing/2014/main" id="{9A699246-53E2-FBFC-FDBA-C95A24F288FD}"/>
+              </a:ext>
+            </a:extLst>
+          </p:cNvPr>
+          <p:cNvSpPr txBox="1"/>
+          <p:nvPr/>
+        </p:nvSpPr>
+        <p:spPr>
+          <a:xfrm>
+            <a:off x="7580376" y="2926080"/>
+            <a:ext cx="3886200" cy="731520"/>
+          </a:xfrm>
+          <a:prstGeom prst="rect">
+            <a:avLst/>
+          </a:prstGeom>
+          <a:noFill/>
+          <a:ln/>
+        </p:spPr>
+        <p:txBody>
+          <a:bodyPr wrap="square" lIns="0" tIns="0" rIns="0" bIns="0" rtlCol="0" anchor="ctr"/>
+          <a:lstStyle/>
+          <a:p>
+            <a:pPr>
+              <a:lnSpc>
+                <a:spcPct val="95000"/>
+              </a:lnSpc>
+            </a:pPr>
+            <a:r>
+              <a:rPr lang="en-US" sz="1180" dirty="0"/>
+              <a:t>So </a:t>
+            </a:r>
+            <a:r>
+              <a:rPr lang="en-US" sz="1180" dirty="0" err="1"/>
+              <a:t>sánh</a:t>
+            </a:r>
+            <a:r>
+              <a:rPr lang="en-US" sz="1180" dirty="0"/>
+              <a:t> </a:t>
+            </a:r>
+            <a:r>
+              <a:rPr lang="en-US" sz="1180" dirty="0" err="1"/>
+              <a:t>kết</a:t>
+            </a:r>
+            <a:r>
+              <a:rPr lang="en-US" sz="1180" dirty="0"/>
+              <a:t> </a:t>
+            </a:r>
+            <a:r>
+              <a:rPr lang="en-US" sz="1180" dirty="0" err="1"/>
+              <a:t>quả</a:t>
+            </a:r>
+            <a:r>
+              <a:rPr lang="en-US" sz="1180" dirty="0"/>
+              <a:t> </a:t>
+            </a:r>
+            <a:r>
+              <a:rPr lang="en-US" sz="1180" dirty="0" err="1"/>
+              <a:t>giữa</a:t>
+            </a:r>
+            <a:r>
+              <a:rPr lang="en-US" sz="1180" dirty="0"/>
+              <a:t> </a:t>
+            </a:r>
+            <a:r>
+              <a:rPr lang="en-US" sz="1180" dirty="0" err="1"/>
+              <a:t>hệ</a:t>
+            </a:r>
+            <a:r>
+              <a:rPr lang="en-US" sz="1180" dirty="0"/>
+              <a:t> </a:t>
+            </a:r>
+            <a:r>
+              <a:rPr lang="en-US" sz="1180" dirty="0" err="1"/>
+              <a:t>thống</a:t>
+            </a:r>
+            <a:r>
+              <a:rPr lang="en-US" sz="1180" dirty="0"/>
+              <a:t> </a:t>
+            </a:r>
+            <a:r>
+              <a:rPr lang="en-US" sz="1180" dirty="0" err="1"/>
+              <a:t>thiết</a:t>
+            </a:r>
+            <a:r>
+              <a:rPr lang="en-US" sz="1180" dirty="0"/>
+              <a:t> </a:t>
+            </a:r>
+            <a:r>
+              <a:rPr lang="en-US" sz="1180" dirty="0" err="1"/>
+              <a:t>kế</a:t>
+            </a:r>
+            <a:r>
+              <a:rPr lang="en-US" sz="1180" dirty="0"/>
+              <a:t> </a:t>
+            </a:r>
+            <a:r>
+              <a:rPr lang="en-US" sz="1180" dirty="0" err="1"/>
+              <a:t>và</a:t>
+            </a:r>
+            <a:r>
+              <a:rPr lang="en-US" sz="1180" dirty="0"/>
+              <a:t> </a:t>
+            </a:r>
+            <a:r>
+              <a:rPr lang="en-US" sz="1180" dirty="0" err="1"/>
+              <a:t>các</a:t>
+            </a:r>
+            <a:r>
+              <a:rPr lang="en-US" sz="1180" dirty="0"/>
+              <a:t> paper </a:t>
+            </a:r>
+            <a:r>
+              <a:rPr lang="en-US" sz="1180" dirty="0" err="1"/>
+              <a:t>gốc</a:t>
+            </a:r>
+            <a:r>
+              <a:rPr lang="en-US" sz="1180" dirty="0"/>
+              <a:t> </a:t>
+            </a:r>
+            <a:r>
+              <a:rPr lang="en-US" sz="1180" dirty="0" err="1"/>
+              <a:t>cũng</a:t>
+            </a:r>
+            <a:r>
+              <a:rPr lang="en-US" sz="1180" dirty="0"/>
+              <a:t> </a:t>
+            </a:r>
+            <a:r>
+              <a:rPr lang="en-US" sz="1180" dirty="0" err="1"/>
+              <a:t>nh</a:t>
+            </a:r>
+            <a:r>
+              <a:rPr lang="vi-VN" sz="1180" dirty="0"/>
+              <a:t>ư</a:t>
+            </a:r>
+            <a:r>
+              <a:rPr lang="en-US" sz="1180" dirty="0"/>
+              <a:t> baseline </a:t>
+            </a:r>
+            <a:r>
+              <a:rPr lang="en-US" sz="1180" dirty="0" err="1"/>
+              <a:t>trên</a:t>
+            </a:r>
+            <a:r>
+              <a:rPr lang="en-US" sz="1180" dirty="0"/>
+              <a:t> </a:t>
+            </a:r>
+            <a:r>
+              <a:rPr lang="en-US" sz="1180" dirty="0" err="1"/>
+              <a:t>tập</a:t>
+            </a:r>
+            <a:r>
+              <a:rPr lang="en-US" sz="1180" dirty="0"/>
+              <a:t> test</a:t>
+            </a:r>
+          </a:p>
+        </p:txBody>
+      </p:sp>
+      <p:sp>
+        <p:nvSpPr>
+          <p:cNvPr id="121" name="Shape 27">
+            <a:extLst>
+              <a:ext uri="{FF2B5EF4-FFF2-40B4-BE49-F238E27FC236}">
+                <a16:creationId xmlns:a16="http://schemas.microsoft.com/office/drawing/2014/main" id="{3B0D0647-7094-EA55-75BB-5FDACFB5E9E7}"/>
+              </a:ext>
+            </a:extLst>
+          </p:cNvPr>
+          <p:cNvSpPr/>
+          <p:nvPr/>
+        </p:nvSpPr>
+        <p:spPr>
+          <a:xfrm>
+            <a:off x="6281928" y="3831336"/>
+            <a:ext cx="5340096" cy="932688"/>
+          </a:xfrm>
+          <a:prstGeom prst="roundRect">
+            <a:avLst>
+              <a:gd name="adj" fmla="val 4902"/>
+            </a:avLst>
+          </a:prstGeom>
+          <a:solidFill>
+            <a:srgbClr val="F1F2FB"/>
+          </a:solidFill>
+          <a:ln w="12700">
+            <a:solidFill>
+              <a:srgbClr val="F1F2FB"/>
+            </a:solidFill>
+            <a:prstDash val="solid"/>
+          </a:ln>
+        </p:spPr>
+        <p:txBody>
+          <a:bodyPr/>
+          <a:lstStyle/>
+          <a:p>
+            <a:endParaRPr lang="en-US"/>
+          </a:p>
+        </p:txBody>
+      </p:sp>
+      <p:sp>
+        <p:nvSpPr>
+          <p:cNvPr id="123" name="Shape 28">
+            <a:extLst>
+              <a:ext uri="{FF2B5EF4-FFF2-40B4-BE49-F238E27FC236}">
+                <a16:creationId xmlns:a16="http://schemas.microsoft.com/office/drawing/2014/main" id="{0266C35C-31FC-B190-0F97-9D163081C6EB}"/>
+              </a:ext>
+            </a:extLst>
+          </p:cNvPr>
+          <p:cNvSpPr/>
+          <p:nvPr/>
+        </p:nvSpPr>
+        <p:spPr>
+          <a:xfrm>
+            <a:off x="6464808" y="4014216"/>
+            <a:ext cx="960120" cy="566928"/>
+          </a:xfrm>
+          <a:prstGeom prst="roundRect">
+            <a:avLst>
+              <a:gd name="adj" fmla="val 12903"/>
+            </a:avLst>
+          </a:prstGeom>
+          <a:solidFill>
+            <a:srgbClr val="3A36A0"/>
+          </a:solidFill>
+          <a:ln w="12700">
+            <a:solidFill>
+              <a:srgbClr val="3A36A0"/>
+            </a:solidFill>
+            <a:prstDash val="solid"/>
+          </a:ln>
+        </p:spPr>
+        <p:txBody>
+          <a:bodyPr/>
+          <a:lstStyle/>
+          <a:p>
+            <a:endParaRPr lang="en-US"/>
+          </a:p>
+        </p:txBody>
+      </p:sp>
+      <p:sp>
+        <p:nvSpPr>
+          <p:cNvPr id="125" name="Text 29">
+            <a:extLst>
+              <a:ext uri="{FF2B5EF4-FFF2-40B4-BE49-F238E27FC236}">
+                <a16:creationId xmlns:a16="http://schemas.microsoft.com/office/drawing/2014/main" id="{AF6B7E6B-0C4C-4612-2D76-C48F9E4112B7}"/>
+              </a:ext>
+            </a:extLst>
+          </p:cNvPr>
+          <p:cNvSpPr txBox="1"/>
+          <p:nvPr/>
+        </p:nvSpPr>
+        <p:spPr>
+          <a:xfrm>
+            <a:off x="6464808" y="4014216"/>
+            <a:ext cx="960120" cy="566928"/>
+          </a:xfrm>
+          <a:prstGeom prst="rect">
+            <a:avLst/>
+          </a:prstGeom>
+          <a:noFill/>
+          <a:ln/>
+        </p:spPr>
+        <p:txBody>
+          <a:bodyPr wrap="square" lIns="0" tIns="0" rIns="0" bIns="0" rtlCol="0" anchor="ctr"/>
+          <a:lstStyle/>
+          <a:p>
+            <a:pPr marL="0" indent="0" algn="ctr">
+              <a:buNone/>
+            </a:pPr>
+            <a:r>
+              <a:rPr lang="en-US" sz="1400" b="1" dirty="0">
+                <a:solidFill>
+                  <a:srgbClr val="FFFFFF"/>
+                </a:solidFill>
+                <a:latin typeface="Calibri" pitchFamily="34" charset="0"/>
+                <a:ea typeface="Calibri" pitchFamily="34" charset="-122"/>
+                <a:cs typeface="Calibri" pitchFamily="34" charset="-120"/>
+              </a:rPr>
+              <a:t>Tuần 7</a:t>
+            </a:r>
+            <a:endParaRPr lang="en-US" sz="1400" dirty="0"/>
+          </a:p>
+        </p:txBody>
+      </p:sp>
+      <p:sp>
+        <p:nvSpPr>
+          <p:cNvPr id="127" name="Text 30">
+            <a:extLst>
+              <a:ext uri="{FF2B5EF4-FFF2-40B4-BE49-F238E27FC236}">
+                <a16:creationId xmlns:a16="http://schemas.microsoft.com/office/drawing/2014/main" id="{FB39F4A2-D7C1-EDAC-7158-94ABA5A39A77}"/>
+              </a:ext>
+            </a:extLst>
+          </p:cNvPr>
+          <p:cNvSpPr txBox="1"/>
+          <p:nvPr/>
+        </p:nvSpPr>
+        <p:spPr>
+          <a:xfrm>
+            <a:off x="7580376" y="3950208"/>
+            <a:ext cx="3886200" cy="731520"/>
+          </a:xfrm>
+          <a:prstGeom prst="rect">
+            <a:avLst/>
+          </a:prstGeom>
+          <a:noFill/>
+          <a:ln/>
+        </p:spPr>
+        <p:txBody>
+          <a:bodyPr wrap="square" lIns="0" tIns="0" rIns="0" bIns="0" rtlCol="0" anchor="ctr"/>
+          <a:lstStyle/>
+          <a:p>
+            <a:pPr>
+              <a:lnSpc>
+                <a:spcPct val="95000"/>
+              </a:lnSpc>
+            </a:pPr>
+            <a:r>
+              <a:rPr lang="en-US" sz="1180">
+                <a:solidFill>
+                  <a:srgbClr val="20223A"/>
+                </a:solidFill>
+                <a:latin typeface="Calibri" pitchFamily="34" charset="0"/>
+                <a:ea typeface="Calibri" pitchFamily="34" charset="-122"/>
+                <a:cs typeface="Calibri" pitchFamily="34" charset="-120"/>
+              </a:rPr>
+              <a:t>Viết báo cáo &amp; tài liệu; đóng gói mã nguồn; chuẩn bị trình bày cuối.</a:t>
+            </a:r>
+            <a:endParaRPr lang="en-US" sz="1180" dirty="0"/>
+          </a:p>
+        </p:txBody>
+      </p:sp>
+    </p:spTree>
+    <p:extLst>
+      <p:ext uri="{BB962C8B-B14F-4D97-AF65-F5344CB8AC3E}">
+        <p14:creationId xmlns:p14="http://schemas.microsoft.com/office/powerpoint/2010/main" val="2888009574"/>
+      </p:ext>
+    </p:extLst>
   </p:cSld>
   <p:clrMapOvr>
     <a:masterClrMapping/>
